--- a/pitch/CareSphere_Congressional_App_Challenge_Deck_B.pptx
+++ b/pitch/CareSphere_Congressional_App_Challenge_Deck_B.pptx
@@ -533,7 +533,7 @@
           <a:lstStyle/>
           <a:p>
             <a:r>
-              <a:t>[0:00–0:14] Hi, I'm [NAME], a [GRADE] at [SCHOOL] in [CITY], California. This is CareSphere AI — a private care companion for older adults, autistic people and their families, on iPhone and on the web.</a:t>
+              <a:t>[0:00–0:14] Hi, I'm Arnav Kochar, a [GRADE] at [SCHOOL] in [CITY], California. This is CareSphere AI — a private care companion for older adults, autistic people and their families, on iPhone and on the web.</a:t>
             </a:r>
           </a:p>
         </p:txBody>
@@ -4526,7 +4526,7 @@
                 </a:solidFill>
                 <a:latin typeface="Plus Jakarta Sans"/>
               </a:rPr>
-              <a:t>CONGRESSIONAL APP CHALLENGE 2026  ·  [CA-XX]</a:t>
+              <a:t>CONGRESSIONAL APP CHALLENGE 2026  ·  CA-10</a:t>
             </a:r>
           </a:p>
         </p:txBody>
@@ -4754,7 +4754,7 @@
                 </a:solidFill>
                 <a:latin typeface="Plus Jakarta Sans"/>
               </a:rPr>
-              <a:t>[Student Name]</a:t>
+              <a:t>Arnav Kochar</a:t>
             </a:r>
           </a:p>
         </p:txBody>
@@ -4800,7 +4800,7 @@
                 </a:solidFill>
                 <a:latin typeface="Plus Jakarta Sans"/>
               </a:rPr>
-              <a:t>[School]  ·  [City], California  ·  [email@example.com]</a:t>
+              <a:t>[School]  ·  [City], California  ·  kochar4646@gmail.com</a:t>
             </a:r>
           </a:p>
         </p:txBody>
@@ -10418,7 +10418,7 @@
                 </a:solidFill>
                 <a:latin typeface="Plus Jakarta Sans"/>
               </a:rPr>
-              <a:t>Sensor history in the visit brief · encrypted backup · Spanish · caregiver-paced reminders.</a:t>
+              <a:t>Apple Health and Bluetooth history in the visit brief, with true source labels · non-diagnostic trends only from real readings.</a:t>
             </a:r>
           </a:p>
         </p:txBody>
@@ -11260,7 +11260,7 @@
                 </a:solidFill>
                 <a:latin typeface="Plus Jakarta Sans"/>
               </a:rPr>
-              <a:t>[Student Name]  ·  [email@example.com]  ·  [School], [City], California</a:t>
+              <a:t>Arnav Kochar  ·  kochar4646@gmail.com  ·  [School], [City], California</a:t>
             </a:r>
           </a:p>
         </p:txBody>
@@ -11726,7 +11726,7 @@
                 </a:solidFill>
                 <a:latin typeface="Plus Jakarta Sans"/>
               </a:rPr>
-              <a:t>— [Student Name], [grade], [School]</a:t>
+              <a:t>— Arnav Kochar, [grade], [School]</a:t>
             </a:r>
           </a:p>
         </p:txBody>
